--- a/Module6_Demo_v1.0/Module6_Context_Engineering.pptx
+++ b/Module6_Demo_v1.0/Module6_Context_Engineering.pptx
@@ -5,7 +5,7 @@
     <p:sldMasterId id="2147483648" r:id="rId1"/>
   </p:sldMasterIdLst>
   <p:notesMasterIdLst>
-    <p:notesMasterId r:id="rId20"/>
+    <p:notesMasterId r:id="rId21"/>
   </p:notesMasterIdLst>
   <p:sldIdLst>
     <p:sldId id="256" r:id="rId2"/>
@@ -18,14 +18,15 @@
     <p:sldId id="263" r:id="rId9"/>
     <p:sldId id="264" r:id="rId10"/>
     <p:sldId id="265" r:id="rId11"/>
-    <p:sldId id="266" r:id="rId12"/>
-    <p:sldId id="267" r:id="rId13"/>
-    <p:sldId id="268" r:id="rId14"/>
-    <p:sldId id="269" r:id="rId15"/>
-    <p:sldId id="270" r:id="rId16"/>
-    <p:sldId id="271" r:id="rId17"/>
-    <p:sldId id="272" r:id="rId18"/>
-    <p:sldId id="273" r:id="rId19"/>
+    <p:sldId id="274" r:id="rId12"/>
+    <p:sldId id="266" r:id="rId13"/>
+    <p:sldId id="267" r:id="rId14"/>
+    <p:sldId id="268" r:id="rId15"/>
+    <p:sldId id="269" r:id="rId16"/>
+    <p:sldId id="270" r:id="rId17"/>
+    <p:sldId id="271" r:id="rId18"/>
+    <p:sldId id="272" r:id="rId19"/>
+    <p:sldId id="273" r:id="rId20"/>
   </p:sldIdLst>
   <p:sldSz cx="12192000" cy="6858000"/>
   <p:notesSz cx="6858000" cy="12192000"/>
@@ -487,7 +488,7 @@
           <a:p>
             <a:fld id="{F7021451-1387-4CA6-816F-3879F97B5CBC}" type="slidenum">
               <a:rPr lang="en-US"/>
-              <a:t>11</a:t>
+              <a:t>12</a:t>
             </a:fld>
             <a:endParaRPr lang="en-US"/>
           </a:p>
@@ -571,7 +572,7 @@
           <a:p>
             <a:fld id="{F7021451-1387-4CA6-816F-3879F97B5CBC}" type="slidenum">
               <a:rPr lang="en-US"/>
-              <a:t>12</a:t>
+              <a:t>13</a:t>
             </a:fld>
             <a:endParaRPr lang="en-US"/>
           </a:p>
@@ -655,7 +656,7 @@
           <a:p>
             <a:fld id="{F7021451-1387-4CA6-816F-3879F97B5CBC}" type="slidenum">
               <a:rPr lang="en-US"/>
-              <a:t>13</a:t>
+              <a:t>14</a:t>
             </a:fld>
             <a:endParaRPr lang="en-US"/>
           </a:p>
@@ -739,7 +740,7 @@
           <a:p>
             <a:fld id="{F7021451-1387-4CA6-816F-3879F97B5CBC}" type="slidenum">
               <a:rPr lang="en-US"/>
-              <a:t>14</a:t>
+              <a:t>15</a:t>
             </a:fld>
             <a:endParaRPr lang="en-US"/>
           </a:p>
@@ -823,7 +824,7 @@
           <a:p>
             <a:fld id="{F7021451-1387-4CA6-816F-3879F97B5CBC}" type="slidenum">
               <a:rPr lang="en-US"/>
-              <a:t>15</a:t>
+              <a:t>16</a:t>
             </a:fld>
             <a:endParaRPr lang="en-US"/>
           </a:p>
@@ -907,7 +908,7 @@
           <a:p>
             <a:fld id="{F7021451-1387-4CA6-816F-3879F97B5CBC}" type="slidenum">
               <a:rPr lang="en-US"/>
-              <a:t>16</a:t>
+              <a:t>17</a:t>
             </a:fld>
             <a:endParaRPr lang="en-US"/>
           </a:p>
@@ -991,7 +992,7 @@
           <a:p>
             <a:fld id="{F7021451-1387-4CA6-816F-3879F97B5CBC}" type="slidenum">
               <a:rPr lang="en-US"/>
-              <a:t>17</a:t>
+              <a:t>18</a:t>
             </a:fld>
             <a:endParaRPr lang="en-US"/>
           </a:p>
@@ -1075,7 +1076,7 @@
           <a:p>
             <a:fld id="{F7021451-1387-4CA6-816F-3879F97B5CBC}" type="slidenum">
               <a:rPr lang="en-US"/>
-              <a:t>18</a:t>
+              <a:t>19</a:t>
             </a:fld>
             <a:endParaRPr lang="en-US"/>
           </a:p>
@@ -3443,6 +3444,103 @@
 
 <file path=ppt/slides/slide11.xml><?xml version="1.0" encoding="utf-8"?>
 <p:sld xmlns:a="http://schemas.openxmlformats.org/drawingml/2006/main" xmlns:r="http://schemas.openxmlformats.org/officeDocument/2006/relationships" xmlns:p="http://schemas.openxmlformats.org/presentationml/2006/main">
+  <p:cSld>
+    <p:spTree>
+      <p:nvGrpSpPr>
+        <p:cNvPr id="1" name=""/>
+        <p:cNvGrpSpPr/>
+        <p:nvPr/>
+      </p:nvGrpSpPr>
+      <p:grpSpPr>
+        <a:xfrm>
+          <a:off x="0" y="0"/>
+          <a:ext cx="0" cy="0"/>
+          <a:chOff x="0" y="0"/>
+          <a:chExt cx="0" cy="0"/>
+        </a:xfrm>
+      </p:grpSpPr>
+      <p:pic>
+        <p:nvPicPr>
+          <p:cNvPr id="3" name="Picture 2">
+            <a:extLst>
+              <a:ext uri="{FF2B5EF4-FFF2-40B4-BE49-F238E27FC236}">
+                <a16:creationId xmlns:a16="http://schemas.microsoft.com/office/drawing/2014/main" id="{74FAC9C3-463E-5053-4D36-FD6A61E1BC98}"/>
+              </a:ext>
+            </a:extLst>
+          </p:cNvPr>
+          <p:cNvPicPr>
+            <a:picLocks noChangeAspect="1"/>
+          </p:cNvPicPr>
+          <p:nvPr/>
+        </p:nvPicPr>
+        <p:blipFill>
+          <a:blip r:embed="rId2"/>
+          <a:stretch>
+            <a:fillRect/>
+          </a:stretch>
+        </p:blipFill>
+        <p:spPr>
+          <a:xfrm>
+            <a:off x="1905000" y="66261"/>
+            <a:ext cx="10287000" cy="6858000"/>
+          </a:xfrm>
+          <a:prstGeom prst="rect">
+            <a:avLst/>
+          </a:prstGeom>
+        </p:spPr>
+      </p:pic>
+      <p:sp>
+        <p:nvSpPr>
+          <p:cNvPr id="4" name="TextBox 3">
+            <a:extLst>
+              <a:ext uri="{FF2B5EF4-FFF2-40B4-BE49-F238E27FC236}">
+                <a16:creationId xmlns:a16="http://schemas.microsoft.com/office/drawing/2014/main" id="{7A1412AC-ECEA-9D51-E411-FC572D19B7F9}"/>
+              </a:ext>
+            </a:extLst>
+          </p:cNvPr>
+          <p:cNvSpPr txBox="1"/>
+          <p:nvPr/>
+        </p:nvSpPr>
+        <p:spPr>
+          <a:xfrm>
+            <a:off x="271670" y="1610139"/>
+            <a:ext cx="1404730" cy="646331"/>
+          </a:xfrm>
+          <a:prstGeom prst="rect">
+            <a:avLst/>
+          </a:prstGeom>
+          <a:noFill/>
+        </p:spPr>
+        <p:txBody>
+          <a:bodyPr wrap="square" rtlCol="0">
+            <a:spAutoFit/>
+          </a:bodyPr>
+          <a:lstStyle/>
+          <a:p>
+            <a:pPr algn="ctr"/>
+            <a:r>
+              <a:rPr lang="en-IN" b="1" dirty="0"/>
+              <a:t>Chunking Strategies</a:t>
+            </a:r>
+            <a:endParaRPr lang="en-GB" b="1" dirty="0"/>
+          </a:p>
+        </p:txBody>
+      </p:sp>
+    </p:spTree>
+    <p:extLst>
+      <p:ext uri="{BB962C8B-B14F-4D97-AF65-F5344CB8AC3E}">
+        <p14:creationId xmlns:p14="http://schemas.microsoft.com/office/powerpoint/2010/main" val="779537342"/>
+      </p:ext>
+    </p:extLst>
+  </p:cSld>
+  <p:clrMapOvr>
+    <a:masterClrMapping/>
+  </p:clrMapOvr>
+</p:sld>
+</file>
+
+<file path=ppt/slides/slide12.xml><?xml version="1.0" encoding="utf-8"?>
+<p:sld xmlns:a="http://schemas.openxmlformats.org/drawingml/2006/main" xmlns:r="http://schemas.openxmlformats.org/officeDocument/2006/relationships" xmlns:p="http://schemas.openxmlformats.org/presentationml/2006/main">
   <p:cSld name="Slide 11">
     <p:spTree>
       <p:nvGrpSpPr>
@@ -4450,7 +4548,7 @@
 </p:sld>
 </file>
 
-<file path=ppt/slides/slide12.xml><?xml version="1.0" encoding="utf-8"?>
+<file path=ppt/slides/slide13.xml><?xml version="1.0" encoding="utf-8"?>
 <p:sld xmlns:a="http://schemas.openxmlformats.org/drawingml/2006/main" xmlns:r="http://schemas.openxmlformats.org/officeDocument/2006/relationships" xmlns:p="http://schemas.openxmlformats.org/presentationml/2006/main">
   <p:cSld name="Slide 12">
     <p:spTree>
@@ -5540,7 +5638,7 @@
 </p:sld>
 </file>
 
-<file path=ppt/slides/slide13.xml><?xml version="1.0" encoding="utf-8"?>
+<file path=ppt/slides/slide14.xml><?xml version="1.0" encoding="utf-8"?>
 <p:sld xmlns:a="http://schemas.openxmlformats.org/drawingml/2006/main" xmlns:r="http://schemas.openxmlformats.org/officeDocument/2006/relationships" xmlns:p="http://schemas.openxmlformats.org/presentationml/2006/main">
   <p:cSld name="Slide 13">
     <p:spTree>
@@ -6610,7 +6708,7 @@
 </p:sld>
 </file>
 
-<file path=ppt/slides/slide14.xml><?xml version="1.0" encoding="utf-8"?>
+<file path=ppt/slides/slide15.xml><?xml version="1.0" encoding="utf-8"?>
 <p:sld xmlns:a="http://schemas.openxmlformats.org/drawingml/2006/main" xmlns:r="http://schemas.openxmlformats.org/officeDocument/2006/relationships" xmlns:p="http://schemas.openxmlformats.org/presentationml/2006/main">
   <p:cSld name="Slide 14">
     <p:spTree>
@@ -7530,7 +7628,7 @@
 </p:sld>
 </file>
 
-<file path=ppt/slides/slide15.xml><?xml version="1.0" encoding="utf-8"?>
+<file path=ppt/slides/slide16.xml><?xml version="1.0" encoding="utf-8"?>
 <p:sld xmlns:a="http://schemas.openxmlformats.org/drawingml/2006/main" xmlns:r="http://schemas.openxmlformats.org/officeDocument/2006/relationships" xmlns:p="http://schemas.openxmlformats.org/presentationml/2006/main">
   <p:cSld name="Slide 15">
     <p:spTree>
@@ -8700,7 +8798,7 @@
 </p:sld>
 </file>
 
-<file path=ppt/slides/slide16.xml><?xml version="1.0" encoding="utf-8"?>
+<file path=ppt/slides/slide17.xml><?xml version="1.0" encoding="utf-8"?>
 <p:sld xmlns:a="http://schemas.openxmlformats.org/drawingml/2006/main" xmlns:r="http://schemas.openxmlformats.org/officeDocument/2006/relationships" xmlns:p="http://schemas.openxmlformats.org/presentationml/2006/main">
   <p:cSld name="Slide 16">
     <p:spTree>
@@ -9790,7 +9888,7 @@
 </p:sld>
 </file>
 
-<file path=ppt/slides/slide17.xml><?xml version="1.0" encoding="utf-8"?>
+<file path=ppt/slides/slide18.xml><?xml version="1.0" encoding="utf-8"?>
 <p:sld xmlns:a="http://schemas.openxmlformats.org/drawingml/2006/main" xmlns:r="http://schemas.openxmlformats.org/officeDocument/2006/relationships" xmlns:p="http://schemas.openxmlformats.org/presentationml/2006/main">
   <p:cSld name="Slide 17">
     <p:spTree>
@@ -10940,7 +11038,7 @@
 </p:sld>
 </file>
 
-<file path=ppt/slides/slide18.xml><?xml version="1.0" encoding="utf-8"?>
+<file path=ppt/slides/slide19.xml><?xml version="1.0" encoding="utf-8"?>
 <p:sld xmlns:a="http://schemas.openxmlformats.org/drawingml/2006/main" xmlns:r="http://schemas.openxmlformats.org/officeDocument/2006/relationships" xmlns:p="http://schemas.openxmlformats.org/presentationml/2006/main">
   <p:cSld name="Slide 18">
     <p:bg>
